--- a/atolye_icerik/sunumlar/en/01_opening_foundations.pptx
+++ b/atolye_icerik/sunumlar/en/01_opening_foundations.pptx
@@ -2678,7 +2678,7 @@
                           <a:ea typeface="Arial" pitchFamily="34" charset="-122"/>
                           <a:cs typeface="Arial" pitchFamily="34" charset="-120"/>
                         </a:rPr>
-                        <a:t>13:30 – 16:45</a:t>
+                        <a:t>13:30 – 15:00</a:t>
                       </a:r>
                       <a:endParaRPr lang="en-US" sz="1150" dirty="0">
                         <a:latin typeface="Arial" charset="0"/>
@@ -2884,7 +2884,7 @@
                           <a:ea typeface="Arial" pitchFamily="34" charset="-122"/>
                           <a:cs typeface="Arial" pitchFamily="34" charset="-120"/>
                         </a:rPr>
-                        <a:t>13:30 – 16:45</a:t>
+                        <a:t>15:15 – 16:45</a:t>
                       </a:r>
                       <a:endParaRPr lang="en-US" sz="1150" dirty="0">
                         <a:latin typeface="Arial" charset="0"/>
